--- a/Report and PPT/EdNote's.pptx
+++ b/Report and PPT/EdNote's.pptx
@@ -5,7 +5,7 @@
     <p:sldMasterId id="2147483648" r:id="rId1"/>
   </p:sldMasterIdLst>
   <p:notesMasterIdLst>
-    <p:notesMasterId r:id="rId15"/>
+    <p:notesMasterId r:id="rId16"/>
   </p:notesMasterIdLst>
   <p:sldIdLst>
     <p:sldId id="256" r:id="rId2"/>
@@ -16,11 +16,12 @@
     <p:sldId id="261" r:id="rId7"/>
     <p:sldId id="262" r:id="rId8"/>
     <p:sldId id="263" r:id="rId9"/>
-    <p:sldId id="272" r:id="rId10"/>
-    <p:sldId id="265" r:id="rId11"/>
-    <p:sldId id="266" r:id="rId12"/>
-    <p:sldId id="267" r:id="rId13"/>
-    <p:sldId id="268" r:id="rId14"/>
+    <p:sldId id="273" r:id="rId10"/>
+    <p:sldId id="272" r:id="rId11"/>
+    <p:sldId id="265" r:id="rId12"/>
+    <p:sldId id="266" r:id="rId13"/>
+    <p:sldId id="267" r:id="rId14"/>
+    <p:sldId id="268" r:id="rId15"/>
   </p:sldIdLst>
   <p:sldSz cx="9144000" cy="6858000" type="screen4x3"/>
   <p:notesSz cx="7559675" cy="10691813"/>
@@ -15974,7 +15975,7 @@
                 <a:ea typeface="Calibri" panose="020F0502020204030204" pitchFamily="34" charset="0"/>
                 <a:cs typeface="Times New Roman" panose="02020603050405020304" pitchFamily="18" charset="0"/>
               </a:rPr>
-              <a:t>Project Presentation of IOHE(22CS422)</a:t>
+              <a:t>Project Presentation of Industry Oriented Hands on Experience (22CS422)</a:t>
             </a:r>
           </a:p>
           <a:p>
@@ -15987,7 +15988,7 @@
               </a:spcBef>
             </a:pPr>
             <a:r>
-              <a:rPr lang="en-IN" b="1" spc="-1" dirty="0">
+              <a:rPr lang="en-IN" spc="-1" dirty="0">
                 <a:latin typeface="Times New Roman" panose="02020603050405020304" pitchFamily="18" charset="0"/>
                 <a:ea typeface="Calibri" panose="020F0502020204030204" pitchFamily="34" charset="0"/>
                 <a:cs typeface="Times New Roman" panose="02020603050405020304" pitchFamily="18" charset="0"/>
@@ -16021,6 +16022,17 @@
                 <a:spcPts val="400"/>
               </a:spcBef>
             </a:pPr>
+            <a:r>
+              <a:rPr lang="en-US" b="1" spc="-1" dirty="0">
+                <a:solidFill>
+                  <a:srgbClr val="000000"/>
+                </a:solidFill>
+                <a:latin typeface="Times New Roman" panose="02020603050405020304" pitchFamily="18" charset="0"/>
+                <a:ea typeface="MS PGothic"/>
+                <a:cs typeface="Times New Roman" panose="02020603050405020304" pitchFamily="18" charset="0"/>
+              </a:rPr>
+              <a:t>  </a:t>
+            </a:r>
             <a:r>
               <a:rPr lang="en-US" b="1" spc="-1" dirty="0" err="1">
                 <a:solidFill>
@@ -16282,6 +16294,227 @@
 </file>
 
 <file path=ppt/slides/slide10.xml><?xml version="1.0" encoding="utf-8"?>
+<p:sld xmlns:a="http://schemas.openxmlformats.org/drawingml/2006/main" xmlns:r="http://schemas.openxmlformats.org/officeDocument/2006/relationships" xmlns:p="http://schemas.openxmlformats.org/presentationml/2006/main">
+  <p:cSld>
+    <p:spTree>
+      <p:nvGrpSpPr>
+        <p:cNvPr id="1" name=""/>
+        <p:cNvGrpSpPr/>
+        <p:nvPr/>
+      </p:nvGrpSpPr>
+      <p:grpSpPr>
+        <a:xfrm>
+          <a:off x="0" y="0"/>
+          <a:ext cx="0" cy="0"/>
+          <a:chOff x="0" y="0"/>
+          <a:chExt cx="0" cy="0"/>
+        </a:xfrm>
+      </p:grpSpPr>
+      <p:sp>
+        <p:nvSpPr>
+          <p:cNvPr id="2" name="Title 1">
+            <a:extLst>
+              <a:ext uri="{FF2B5EF4-FFF2-40B4-BE49-F238E27FC236}">
+                <a16:creationId xmlns:a16="http://schemas.microsoft.com/office/drawing/2014/main" id="{CCFB7F41-614B-4464-8F49-98AF3596C878}"/>
+              </a:ext>
+            </a:extLst>
+          </p:cNvPr>
+          <p:cNvSpPr>
+            <a:spLocks noGrp="1"/>
+          </p:cNvSpPr>
+          <p:nvPr>
+            <p:ph type="title"/>
+          </p:nvPr>
+        </p:nvSpPr>
+        <p:spPr>
+          <a:xfrm>
+            <a:off x="383458" y="0"/>
+            <a:ext cx="5484960" cy="912960"/>
+          </a:xfrm>
+        </p:spPr>
+        <p:txBody>
+          <a:bodyPr/>
+          <a:lstStyle/>
+          <a:p>
+            <a:r>
+              <a:rPr lang="en-US" sz="2800" b="1" dirty="0">
+                <a:latin typeface="Times New Roman" panose="02020603050405020304" pitchFamily="18" charset="0"/>
+                <a:cs typeface="Times New Roman" panose="02020603050405020304" pitchFamily="18" charset="0"/>
+              </a:rPr>
+              <a:t>Key Features</a:t>
+            </a:r>
+          </a:p>
+        </p:txBody>
+      </p:sp>
+      <p:sp>
+        <p:nvSpPr>
+          <p:cNvPr id="3" name="Text Placeholder 2">
+            <a:extLst>
+              <a:ext uri="{FF2B5EF4-FFF2-40B4-BE49-F238E27FC236}">
+                <a16:creationId xmlns:a16="http://schemas.microsoft.com/office/drawing/2014/main" id="{A136BB09-1FCB-4C64-A33E-812441A29E8C}"/>
+              </a:ext>
+            </a:extLst>
+          </p:cNvPr>
+          <p:cNvSpPr>
+            <a:spLocks noGrp="1"/>
+          </p:cNvSpPr>
+          <p:nvPr>
+            <p:ph type="body"/>
+          </p:nvPr>
+        </p:nvSpPr>
+        <p:spPr>
+          <a:xfrm>
+            <a:off x="304801" y="1150374"/>
+            <a:ext cx="8347586" cy="4090219"/>
+          </a:xfrm>
+        </p:spPr>
+        <p:txBody>
+          <a:bodyPr>
+            <a:normAutofit/>
+          </a:bodyPr>
+          <a:lstStyle/>
+          <a:p>
+            <a:pPr marL="457200" indent="-457200">
+              <a:buFont typeface="+mj-lt"/>
+              <a:buAutoNum type="arabicPeriod"/>
+            </a:pPr>
+            <a:r>
+              <a:rPr lang="en-US" sz="1800" b="1" dirty="0">
+                <a:latin typeface="Times New Roman" panose="02020603050405020304" pitchFamily="18" charset="0"/>
+                <a:cs typeface="Times New Roman" panose="02020603050405020304" pitchFamily="18" charset="0"/>
+              </a:rPr>
+              <a:t>MCQ’s and Courses: </a:t>
+            </a:r>
+            <a:r>
+              <a:rPr lang="en-US" sz="1800" dirty="0" err="1">
+                <a:latin typeface="Times New Roman" panose="02020603050405020304" pitchFamily="18" charset="0"/>
+                <a:cs typeface="Times New Roman" panose="02020603050405020304" pitchFamily="18" charset="0"/>
+              </a:rPr>
+              <a:t>EdNote’s</a:t>
+            </a:r>
+            <a:r>
+              <a:rPr lang="en-US" sz="1800" dirty="0">
+                <a:latin typeface="Times New Roman" panose="02020603050405020304" pitchFamily="18" charset="0"/>
+                <a:cs typeface="Times New Roman" panose="02020603050405020304" pitchFamily="18" charset="0"/>
+              </a:rPr>
+              <a:t> provide a comprehensive collection of MCQ feature and also including courses part, helping to practice topics and learning to enhance knowledge.</a:t>
+            </a:r>
+          </a:p>
+          <a:p>
+            <a:pPr marL="457200" indent="-457200">
+              <a:buFont typeface="+mj-lt"/>
+              <a:buAutoNum type="arabicPeriod"/>
+            </a:pPr>
+            <a:endParaRPr lang="en-US" sz="1800" b="1" dirty="0">
+              <a:latin typeface="Times New Roman" panose="02020603050405020304" pitchFamily="18" charset="0"/>
+              <a:cs typeface="Times New Roman" panose="02020603050405020304" pitchFamily="18" charset="0"/>
+            </a:endParaRPr>
+          </a:p>
+          <a:p>
+            <a:pPr marL="457200" indent="-457200">
+              <a:buFont typeface="+mj-lt"/>
+              <a:buAutoNum type="arabicPeriod"/>
+            </a:pPr>
+            <a:r>
+              <a:rPr lang="en-US" sz="1800" b="1" dirty="0">
+                <a:latin typeface="Times New Roman" panose="02020603050405020304" pitchFamily="18" charset="0"/>
+                <a:cs typeface="Times New Roman" panose="02020603050405020304" pitchFamily="18" charset="0"/>
+              </a:rPr>
+              <a:t>Smart Notes: </a:t>
+            </a:r>
+            <a:r>
+              <a:rPr lang="en-US" sz="1800" dirty="0">
+                <a:latin typeface="Times New Roman" panose="02020603050405020304" pitchFamily="18" charset="0"/>
+                <a:cs typeface="Times New Roman" panose="02020603050405020304" pitchFamily="18" charset="0"/>
+              </a:rPr>
+              <a:t>This feature simplify the study process with adding notes of particular topic, to pin important ones, to search within notes and deleting notes to make revision faster and more effective.</a:t>
+            </a:r>
+          </a:p>
+          <a:p>
+            <a:pPr marL="457200" indent="-457200">
+              <a:buFont typeface="+mj-lt"/>
+              <a:buAutoNum type="arabicPeriod"/>
+            </a:pPr>
+            <a:endParaRPr lang="en-US" sz="1800" b="1" dirty="0">
+              <a:latin typeface="Times New Roman" panose="02020603050405020304" pitchFamily="18" charset="0"/>
+              <a:cs typeface="Times New Roman" panose="02020603050405020304" pitchFamily="18" charset="0"/>
+            </a:endParaRPr>
+          </a:p>
+          <a:p>
+            <a:pPr marL="457200" indent="-457200">
+              <a:buFont typeface="+mj-lt"/>
+              <a:buAutoNum type="arabicPeriod"/>
+            </a:pPr>
+            <a:r>
+              <a:rPr lang="en-US" sz="1800" b="1" dirty="0">
+                <a:latin typeface="Times New Roman" panose="02020603050405020304" pitchFamily="18" charset="0"/>
+                <a:cs typeface="Times New Roman" panose="02020603050405020304" pitchFamily="18" charset="0"/>
+              </a:rPr>
+              <a:t>Interactive Flashcards: </a:t>
+            </a:r>
+            <a:r>
+              <a:rPr lang="en-US" sz="1800" dirty="0">
+                <a:latin typeface="Times New Roman" panose="02020603050405020304" pitchFamily="18" charset="0"/>
+                <a:cs typeface="Times New Roman" panose="02020603050405020304" pitchFamily="18" charset="0"/>
+              </a:rPr>
+              <a:t>Make revision easy by using flashcards to support in recalling topics that help in retain information longer in very effective way.</a:t>
+            </a:r>
+          </a:p>
+          <a:p>
+            <a:pPr marL="457200" indent="-457200">
+              <a:buFont typeface="+mj-lt"/>
+              <a:buAutoNum type="arabicPeriod"/>
+            </a:pPr>
+            <a:endParaRPr lang="en-US" sz="1800" dirty="0">
+              <a:latin typeface="Times New Roman" panose="02020603050405020304" pitchFamily="18" charset="0"/>
+              <a:cs typeface="Times New Roman" panose="02020603050405020304" pitchFamily="18" charset="0"/>
+            </a:endParaRPr>
+          </a:p>
+          <a:p>
+            <a:pPr marL="457200" indent="-457200">
+              <a:buFont typeface="+mj-lt"/>
+              <a:buAutoNum type="arabicPeriod"/>
+            </a:pPr>
+            <a:r>
+              <a:rPr lang="en-US" sz="1800" b="1" dirty="0">
+                <a:latin typeface="Times New Roman" panose="02020603050405020304" pitchFamily="18" charset="0"/>
+                <a:cs typeface="Times New Roman" panose="02020603050405020304" pitchFamily="18" charset="0"/>
+              </a:rPr>
+              <a:t>Analytics: </a:t>
+            </a:r>
+            <a:r>
+              <a:rPr lang="en-US" sz="1800" dirty="0">
+                <a:latin typeface="Times New Roman" panose="02020603050405020304" pitchFamily="18" charset="0"/>
+                <a:cs typeface="Times New Roman" panose="02020603050405020304" pitchFamily="18" charset="0"/>
+              </a:rPr>
+              <a:t>This feature provides a visual representation of score trend and topic-wise performance through charts. Helping users to get a clear view to identify areas to do better and improve accordingly. </a:t>
+            </a:r>
+          </a:p>
+          <a:p>
+            <a:pPr marL="0" indent="0">
+              <a:buNone/>
+            </a:pPr>
+            <a:endParaRPr lang="en-US" sz="2000" b="1" dirty="0">
+              <a:latin typeface="Times New Roman" panose="02020603050405020304" pitchFamily="18" charset="0"/>
+              <a:cs typeface="Times New Roman" panose="02020603050405020304" pitchFamily="18" charset="0"/>
+            </a:endParaRPr>
+          </a:p>
+        </p:txBody>
+      </p:sp>
+    </p:spTree>
+    <p:extLst>
+      <p:ext uri="{BB962C8B-B14F-4D97-AF65-F5344CB8AC3E}">
+        <p14:creationId xmlns:p14="http://schemas.microsoft.com/office/powerpoint/2010/main" val="1189144508"/>
+      </p:ext>
+    </p:extLst>
+  </p:cSld>
+  <p:clrMapOvr>
+    <a:masterClrMapping/>
+  </p:clrMapOvr>
+</p:sld>
+</file>
+
+<file path=ppt/slides/slide11.xml><?xml version="1.0" encoding="utf-8"?>
 <p:sld xmlns:a="http://schemas.openxmlformats.org/drawingml/2006/main" xmlns:r="http://schemas.openxmlformats.org/officeDocument/2006/relationships" xmlns:p="http://schemas.openxmlformats.org/presentationml/2006/main">
   <p:cSld>
     <p:spTree>
@@ -16312,8 +16545,8 @@
         </p:nvSpPr>
         <p:spPr>
           <a:xfrm>
-            <a:off x="344128" y="1375236"/>
-            <a:ext cx="8646289" cy="3323987"/>
+            <a:off x="344128" y="1208088"/>
+            <a:ext cx="8646289" cy="4278094"/>
           </a:xfrm>
           <a:prstGeom prst="rect">
             <a:avLst/>
@@ -16343,7 +16576,7 @@
               <a:tabLst/>
             </a:pPr>
             <a:r>
-              <a:rPr lang="en-US" altLang="en-US" sz="2000" b="1" dirty="0">
+              <a:rPr lang="en-US" altLang="en-US" b="1" dirty="0">
                 <a:latin typeface="Times New Roman" panose="02020603050405020304" pitchFamily="18" charset="0"/>
                 <a:cs typeface="Times New Roman" panose="02020603050405020304" pitchFamily="18" charset="0"/>
               </a:rPr>
@@ -16374,34 +16607,10 @@
               <a:buChar char="•"/>
               <a:tabLst/>
             </a:pPr>
-            <a:r>
-              <a:rPr kumimoji="0" lang="en-US" altLang="en-US" sz="2000" b="1" i="0" u="none" strike="noStrike" cap="none" normalizeH="0" baseline="0" dirty="0">
-                <a:ln>
-                  <a:noFill/>
-                </a:ln>
-                <a:solidFill>
-                  <a:schemeClr val="tx1"/>
-                </a:solidFill>
-                <a:effectLst/>
-                <a:latin typeface="Times New Roman" panose="02020603050405020304" pitchFamily="18" charset="0"/>
-                <a:cs typeface="Times New Roman" panose="02020603050405020304" pitchFamily="18" charset="0"/>
-              </a:rPr>
-              <a:t>Offline Study Mode: </a:t>
-            </a:r>
-            <a:r>
-              <a:rPr kumimoji="0" lang="en-US" altLang="en-US" i="0" u="none" strike="noStrike" cap="none" normalizeH="0" baseline="0" dirty="0">
-                <a:ln>
-                  <a:noFill/>
-                </a:ln>
-                <a:solidFill>
-                  <a:schemeClr val="tx1"/>
-                </a:solidFill>
-                <a:effectLst/>
-                <a:latin typeface="Times New Roman" panose="02020603050405020304" pitchFamily="18" charset="0"/>
-                <a:cs typeface="Times New Roman" panose="02020603050405020304" pitchFamily="18" charset="0"/>
-              </a:rPr>
-              <a:t>Users will be able to download courses, notes, and flashcards to study without any internet connection.</a:t>
-            </a:r>
+            <a:endParaRPr lang="en-US" altLang="en-US" dirty="0">
+              <a:latin typeface="Times New Roman" panose="02020603050405020304" pitchFamily="18" charset="0"/>
+              <a:cs typeface="Times New Roman" panose="02020603050405020304" pitchFamily="18" charset="0"/>
+            </a:endParaRPr>
           </a:p>
           <a:p>
             <a:pPr marL="285750" marR="0" lvl="0" indent="-285750" algn="just" defTabSz="914400" rtl="0" eaLnBrk="0" fontAlgn="base" latinLnBrk="0" hangingPunct="0">
@@ -16421,11 +16630,18 @@
               <a:tabLst/>
             </a:pPr>
             <a:r>
-              <a:rPr lang="en-US" altLang="en-US" sz="2000" b="1" dirty="0">
+              <a:rPr kumimoji="0" lang="en-US" altLang="en-US" b="1" i="0" u="none" strike="noStrike" cap="none" normalizeH="0" baseline="0" dirty="0">
+                <a:ln>
+                  <a:noFill/>
+                </a:ln>
+                <a:solidFill>
+                  <a:schemeClr val="tx1"/>
+                </a:solidFill>
+                <a:effectLst/>
                 <a:latin typeface="Times New Roman" panose="02020603050405020304" pitchFamily="18" charset="0"/>
                 <a:cs typeface="Times New Roman" panose="02020603050405020304" pitchFamily="18" charset="0"/>
               </a:rPr>
-              <a:t>Certification: </a:t>
+              <a:t>Offline Study Mode: </a:t>
             </a:r>
             <a:r>
               <a:rPr kumimoji="0" lang="en-US" altLang="en-US" i="0" u="none" strike="noStrike" cap="none" normalizeH="0" baseline="0" dirty="0">
@@ -16439,7 +16655,7 @@
                 <a:latin typeface="Times New Roman" panose="02020603050405020304" pitchFamily="18" charset="0"/>
                 <a:cs typeface="Times New Roman" panose="02020603050405020304" pitchFamily="18" charset="0"/>
               </a:rPr>
-              <a:t>After completing every module or courses, certificates will be issued to boost your career prospects.</a:t>
+              <a:t>Users will be able to download courses, notes, and flashcards to study without any internet connection.</a:t>
             </a:r>
           </a:p>
           <a:p>
@@ -16459,20 +16675,17 @@
               <a:buChar char="•"/>
               <a:tabLst/>
             </a:pPr>
-            <a:r>
-              <a:rPr lang="en-US" altLang="en-US" sz="2000" b="1" dirty="0">
-                <a:latin typeface="Times New Roman" panose="02020603050405020304" pitchFamily="18" charset="0"/>
-                <a:cs typeface="Times New Roman" panose="02020603050405020304" pitchFamily="18" charset="0"/>
-              </a:rPr>
-              <a:t>Mobile App: </a:t>
-            </a:r>
-            <a:r>
-              <a:rPr lang="en-US" altLang="en-US" dirty="0">
-                <a:latin typeface="Times New Roman" panose="02020603050405020304" pitchFamily="18" charset="0"/>
-                <a:cs typeface="Times New Roman" panose="02020603050405020304" pitchFamily="18" charset="0"/>
-              </a:rPr>
-              <a:t>Making the platform accessible anytime.</a:t>
-            </a:r>
+            <a:endParaRPr kumimoji="0" lang="en-US" altLang="en-US" i="0" u="none" strike="noStrike" cap="none" normalizeH="0" baseline="0" dirty="0">
+              <a:ln>
+                <a:noFill/>
+              </a:ln>
+              <a:solidFill>
+                <a:schemeClr val="tx1"/>
+              </a:solidFill>
+              <a:effectLst/>
+              <a:latin typeface="Times New Roman" panose="02020603050405020304" pitchFamily="18" charset="0"/>
+              <a:cs typeface="Times New Roman" panose="02020603050405020304" pitchFamily="18" charset="0"/>
+            </a:endParaRPr>
           </a:p>
           <a:p>
             <a:pPr marL="285750" marR="0" lvl="0" indent="-285750" algn="just" defTabSz="914400" rtl="0" eaLnBrk="0" fontAlgn="base" latinLnBrk="0" hangingPunct="0">
@@ -16492,7 +16705,129 @@
               <a:tabLst/>
             </a:pPr>
             <a:r>
-              <a:rPr kumimoji="0" lang="en-US" altLang="en-US" sz="2000" b="1" i="0" u="none" strike="noStrike" cap="none" normalizeH="0" baseline="0" dirty="0">
+              <a:rPr lang="en-US" altLang="en-US" b="1" dirty="0">
+                <a:latin typeface="Times New Roman" panose="02020603050405020304" pitchFamily="18" charset="0"/>
+                <a:cs typeface="Times New Roman" panose="02020603050405020304" pitchFamily="18" charset="0"/>
+              </a:rPr>
+              <a:t>Certification: </a:t>
+            </a:r>
+            <a:r>
+              <a:rPr kumimoji="0" lang="en-US" altLang="en-US" i="0" u="none" strike="noStrike" cap="none" normalizeH="0" baseline="0" dirty="0">
+                <a:ln>
+                  <a:noFill/>
+                </a:ln>
+                <a:solidFill>
+                  <a:schemeClr val="tx1"/>
+                </a:solidFill>
+                <a:effectLst/>
+                <a:latin typeface="Times New Roman" panose="02020603050405020304" pitchFamily="18" charset="0"/>
+                <a:cs typeface="Times New Roman" panose="02020603050405020304" pitchFamily="18" charset="0"/>
+              </a:rPr>
+              <a:t>After completing every module or courses, certificates will be issued to boost your career prospects.</a:t>
+            </a:r>
+          </a:p>
+          <a:p>
+            <a:pPr marL="285750" marR="0" lvl="0" indent="-285750" algn="just" defTabSz="914400" rtl="0" eaLnBrk="0" fontAlgn="base" latinLnBrk="0" hangingPunct="0">
+              <a:lnSpc>
+                <a:spcPct val="100000"/>
+              </a:lnSpc>
+              <a:spcBef>
+                <a:spcPct val="0"/>
+              </a:spcBef>
+              <a:spcAft>
+                <a:spcPct val="0"/>
+              </a:spcAft>
+              <a:buClrTx/>
+              <a:buSzTx/>
+              <a:buFont typeface="Arial" panose="020B0604020202020204" pitchFamily="34" charset="0"/>
+              <a:buChar char="•"/>
+              <a:tabLst/>
+            </a:pPr>
+            <a:endParaRPr kumimoji="0" lang="en-US" altLang="en-US" i="0" u="none" strike="noStrike" cap="none" normalizeH="0" baseline="0" dirty="0">
+              <a:ln>
+                <a:noFill/>
+              </a:ln>
+              <a:solidFill>
+                <a:schemeClr val="tx1"/>
+              </a:solidFill>
+              <a:effectLst/>
+              <a:latin typeface="Times New Roman" panose="02020603050405020304" pitchFamily="18" charset="0"/>
+              <a:cs typeface="Times New Roman" panose="02020603050405020304" pitchFamily="18" charset="0"/>
+            </a:endParaRPr>
+          </a:p>
+          <a:p>
+            <a:pPr marL="285750" marR="0" lvl="0" indent="-285750" algn="just" defTabSz="914400" rtl="0" eaLnBrk="0" fontAlgn="base" latinLnBrk="0" hangingPunct="0">
+              <a:lnSpc>
+                <a:spcPct val="100000"/>
+              </a:lnSpc>
+              <a:spcBef>
+                <a:spcPct val="0"/>
+              </a:spcBef>
+              <a:spcAft>
+                <a:spcPct val="0"/>
+              </a:spcAft>
+              <a:buClrTx/>
+              <a:buSzTx/>
+              <a:buFont typeface="Arial" panose="020B0604020202020204" pitchFamily="34" charset="0"/>
+              <a:buChar char="•"/>
+              <a:tabLst/>
+            </a:pPr>
+            <a:r>
+              <a:rPr lang="en-US" altLang="en-US" b="1" dirty="0">
+                <a:latin typeface="Times New Roman" panose="02020603050405020304" pitchFamily="18" charset="0"/>
+                <a:cs typeface="Times New Roman" panose="02020603050405020304" pitchFamily="18" charset="0"/>
+              </a:rPr>
+              <a:t>Mobile App: </a:t>
+            </a:r>
+            <a:r>
+              <a:rPr lang="en-US" altLang="en-US" dirty="0">
+                <a:latin typeface="Times New Roman" panose="02020603050405020304" pitchFamily="18" charset="0"/>
+                <a:cs typeface="Times New Roman" panose="02020603050405020304" pitchFamily="18" charset="0"/>
+              </a:rPr>
+              <a:t>Making the platform accessible anytime.</a:t>
+            </a:r>
+          </a:p>
+          <a:p>
+            <a:pPr marL="285750" marR="0" lvl="0" indent="-285750" algn="just" defTabSz="914400" rtl="0" eaLnBrk="0" fontAlgn="base" latinLnBrk="0" hangingPunct="0">
+              <a:lnSpc>
+                <a:spcPct val="100000"/>
+              </a:lnSpc>
+              <a:spcBef>
+                <a:spcPct val="0"/>
+              </a:spcBef>
+              <a:spcAft>
+                <a:spcPct val="0"/>
+              </a:spcAft>
+              <a:buClrTx/>
+              <a:buSzTx/>
+              <a:buFont typeface="Arial" panose="020B0604020202020204" pitchFamily="34" charset="0"/>
+              <a:buChar char="•"/>
+              <a:tabLst/>
+            </a:pPr>
+            <a:endParaRPr lang="en-US" altLang="en-US" dirty="0">
+              <a:latin typeface="Times New Roman" panose="02020603050405020304" pitchFamily="18" charset="0"/>
+              <a:cs typeface="Times New Roman" panose="02020603050405020304" pitchFamily="18" charset="0"/>
+            </a:endParaRPr>
+          </a:p>
+          <a:p>
+            <a:pPr marL="285750" marR="0" lvl="0" indent="-285750" algn="just" defTabSz="914400" rtl="0" eaLnBrk="0" fontAlgn="base" latinLnBrk="0" hangingPunct="0">
+              <a:lnSpc>
+                <a:spcPct val="100000"/>
+              </a:lnSpc>
+              <a:spcBef>
+                <a:spcPct val="0"/>
+              </a:spcBef>
+              <a:spcAft>
+                <a:spcPct val="0"/>
+              </a:spcAft>
+              <a:buClrTx/>
+              <a:buSzTx/>
+              <a:buFont typeface="Arial" panose="020B0604020202020204" pitchFamily="34" charset="0"/>
+              <a:buChar char="•"/>
+              <a:tabLst/>
+            </a:pPr>
+            <a:r>
+              <a:rPr kumimoji="0" lang="en-US" altLang="en-US" b="1" i="0" u="none" strike="noStrike" cap="none" normalizeH="0" baseline="0" dirty="0">
                 <a:ln>
                   <a:noFill/>
                 </a:ln>
@@ -16576,7 +16911,7 @@
           <a:lstStyle/>
           <a:p>
             <a:r>
-              <a:rPr lang="en-US" sz="3200" b="1" dirty="0">
+              <a:rPr lang="en-US" sz="2800" b="1" dirty="0">
                 <a:latin typeface="Times New Roman" panose="02020603050405020304" pitchFamily="18" charset="0"/>
                 <a:cs typeface="Times New Roman" panose="02020603050405020304" pitchFamily="18" charset="0"/>
               </a:rPr>
@@ -16593,7 +16928,7 @@
 </p:sld>
 </file>
 
-<file path=ppt/slides/slide11.xml><?xml version="1.0" encoding="utf-8"?>
+<file path=ppt/slides/slide12.xml><?xml version="1.0" encoding="utf-8"?>
 <p:sld xmlns:a="http://schemas.openxmlformats.org/drawingml/2006/main" xmlns:r="http://schemas.openxmlformats.org/officeDocument/2006/relationships" xmlns:p="http://schemas.openxmlformats.org/presentationml/2006/main">
   <p:cSld>
     <p:spTree>
@@ -16649,7 +16984,7 @@
               </a:tabLst>
             </a:pPr>
             <a:r>
-              <a:rPr lang="en-IN" sz="3200" b="1" u="none" strike="noStrike" dirty="0">
+              <a:rPr lang="en-IN" sz="2800" b="1" u="none" strike="noStrike" dirty="0">
                 <a:solidFill>
                   <a:schemeClr val="dk1"/>
                 </a:solidFill>
@@ -16659,9 +16994,9 @@
                 <a:ea typeface="DejaVu Sans"/>
                 <a:cs typeface="Times New Roman" panose="02020603050405020304" pitchFamily="18" charset="0"/>
               </a:rPr>
-              <a:t>     Conclusion</a:t>
-            </a:r>
-            <a:endParaRPr lang="en-IN" sz="3200" b="0" u="none" strike="noStrike" dirty="0">
+              <a:t>    Conclusion</a:t>
+            </a:r>
+            <a:endParaRPr lang="en-IN" sz="2800" b="0" u="none" strike="noStrike" dirty="0">
               <a:solidFill>
                 <a:srgbClr val="000000"/>
               </a:solidFill>
@@ -16890,7 +17225,7 @@
 </p:sld>
 </file>
 
-<file path=ppt/slides/slide12.xml><?xml version="1.0" encoding="utf-8"?>
+<file path=ppt/slides/slide13.xml><?xml version="1.0" encoding="utf-8"?>
 <p:sld xmlns:a="http://schemas.openxmlformats.org/drawingml/2006/main" xmlns:r="http://schemas.openxmlformats.org/officeDocument/2006/relationships" xmlns:p="http://schemas.openxmlformats.org/presentationml/2006/main">
   <p:cSld>
     <p:spTree>
@@ -16946,7 +17281,7 @@
               </a:tabLst>
             </a:pPr>
             <a:r>
-              <a:rPr lang="en-IN" sz="3200" b="1" u="none" strike="noStrike" dirty="0">
+              <a:rPr lang="en-IN" sz="2800" b="1" u="none" strike="noStrike" dirty="0">
                 <a:solidFill>
                   <a:schemeClr val="dk1"/>
                 </a:solidFill>
@@ -16959,7 +17294,7 @@
               <a:t>   </a:t>
             </a:r>
             <a:r>
-              <a:rPr lang="en-IN" sz="3200" b="1" dirty="0">
+              <a:rPr lang="en-IN" sz="2800" b="1" dirty="0">
                 <a:solidFill>
                   <a:schemeClr val="dk1"/>
                 </a:solidFill>
@@ -16970,7 +17305,7 @@
               <a:t> </a:t>
             </a:r>
             <a:r>
-              <a:rPr lang="en-IN" sz="3200" b="1" u="none" strike="noStrike" dirty="0">
+              <a:rPr lang="en-IN" sz="2800" b="1" u="none" strike="noStrike" dirty="0">
                 <a:solidFill>
                   <a:schemeClr val="dk1"/>
                 </a:solidFill>
@@ -16982,7 +17317,7 @@
               </a:rPr>
               <a:t>References</a:t>
             </a:r>
-            <a:endParaRPr lang="en-IN" sz="3200" b="0" u="none" strike="noStrike" dirty="0">
+            <a:endParaRPr lang="en-IN" sz="2800" b="0" u="none" strike="noStrike" dirty="0">
               <a:solidFill>
                 <a:srgbClr val="000000"/>
               </a:solidFill>
@@ -17197,7 +17532,7 @@
 </p:sld>
 </file>
 
-<file path=ppt/slides/slide13.xml><?xml version="1.0" encoding="utf-8"?>
+<file path=ppt/slides/slide14.xml><?xml version="1.0" encoding="utf-8"?>
 <p:sld xmlns:a="http://schemas.openxmlformats.org/drawingml/2006/main" xmlns:r="http://schemas.openxmlformats.org/officeDocument/2006/relationships" xmlns:p="http://schemas.openxmlformats.org/presentationml/2006/main">
   <p:cSld>
     <p:spTree>
@@ -17323,7 +17658,7 @@
                 <a:latin typeface="Calibri"/>
                 <a:ea typeface="MS PGothic"/>
               </a:rPr>
-              <a:t>13</a:t>
+              <a:t>14</a:t>
             </a:fld>
             <a:endParaRPr lang="en-IN" sz="1200" b="0" u="none" strike="noStrike">
               <a:solidFill>
@@ -17404,7 +17739,7 @@
               </a:lnSpc>
             </a:pPr>
             <a:r>
-              <a:rPr lang="en" sz="3200" b="1" u="none" strike="noStrike" dirty="0">
+              <a:rPr lang="en" sz="2800" b="1" u="none" strike="noStrike" dirty="0">
                 <a:solidFill>
                   <a:schemeClr val="dk1"/>
                 </a:solidFill>
@@ -17415,7 +17750,7 @@
               </a:rPr>
               <a:t>Introduction</a:t>
             </a:r>
-            <a:endParaRPr lang="en-IN" sz="3200" b="1" u="none" strike="noStrike" dirty="0">
+            <a:endParaRPr lang="en-IN" sz="2800" b="1" u="none" strike="noStrike" dirty="0">
               <a:solidFill>
                 <a:srgbClr val="000000"/>
               </a:solidFill>
@@ -17533,14 +17868,14 @@
               <a:buChar char="•"/>
             </a:pPr>
             <a:r>
-              <a:rPr lang="en-IN" sz="2000" dirty="0" err="1">
+              <a:rPr lang="en-IN" dirty="0" err="1">
                 <a:latin typeface="Times New Roman" panose="02020603050405020304" pitchFamily="18" charset="0"/>
                 <a:cs typeface="Times New Roman" panose="02020603050405020304" pitchFamily="18" charset="0"/>
               </a:rPr>
               <a:t>EdNote’s</a:t>
             </a:r>
             <a:r>
-              <a:rPr lang="en-IN" sz="2000" dirty="0">
+              <a:rPr lang="en-IN" dirty="0">
                 <a:latin typeface="Times New Roman" panose="02020603050405020304" pitchFamily="18" charset="0"/>
                 <a:cs typeface="Times New Roman" panose="02020603050405020304" pitchFamily="18" charset="0"/>
               </a:rPr>
@@ -17549,7 +17884,7 @@
           </a:p>
           <a:p>
             <a:pPr algn="just"/>
-            <a:endParaRPr lang="en-IN" sz="2000" dirty="0">
+            <a:endParaRPr lang="en-IN" dirty="0">
               <a:latin typeface="Times New Roman" panose="02020603050405020304" pitchFamily="18" charset="0"/>
               <a:cs typeface="Times New Roman" panose="02020603050405020304" pitchFamily="18" charset="0"/>
             </a:endParaRPr>
@@ -17560,7 +17895,7 @@
               <a:buChar char="•"/>
             </a:pPr>
             <a:r>
-              <a:rPr lang="en-IN" sz="2000" dirty="0">
+              <a:rPr lang="en-IN" dirty="0">
                 <a:latin typeface="Times New Roman" panose="02020603050405020304" pitchFamily="18" charset="0"/>
                 <a:cs typeface="Times New Roman" panose="02020603050405020304" pitchFamily="18" charset="0"/>
               </a:rPr>
@@ -17569,7 +17904,7 @@
           </a:p>
           <a:p>
             <a:pPr algn="just"/>
-            <a:endParaRPr lang="en-IN" sz="2000" dirty="0">
+            <a:endParaRPr lang="en-IN" dirty="0">
               <a:latin typeface="Times New Roman" panose="02020603050405020304" pitchFamily="18" charset="0"/>
               <a:cs typeface="Times New Roman" panose="02020603050405020304" pitchFamily="18" charset="0"/>
             </a:endParaRPr>
@@ -17580,35 +17915,35 @@
               <a:buChar char="•"/>
             </a:pPr>
             <a:r>
-              <a:rPr lang="en-US" sz="2000" dirty="0">
+              <a:rPr lang="en-US" dirty="0">
                 <a:latin typeface="Times New Roman" panose="02020603050405020304" pitchFamily="18" charset="0"/>
                 <a:cs typeface="Times New Roman" panose="02020603050405020304" pitchFamily="18" charset="0"/>
               </a:rPr>
               <a:t>In addition, </a:t>
             </a:r>
             <a:r>
-              <a:rPr lang="en-US" sz="2000" dirty="0" err="1">
+              <a:rPr lang="en-US" dirty="0" err="1">
                 <a:latin typeface="Times New Roman" panose="02020603050405020304" pitchFamily="18" charset="0"/>
                 <a:cs typeface="Times New Roman" panose="02020603050405020304" pitchFamily="18" charset="0"/>
               </a:rPr>
               <a:t>EdNote’s</a:t>
             </a:r>
             <a:r>
-              <a:rPr lang="en-US" sz="2000" dirty="0">
+              <a:rPr lang="en-US" dirty="0">
                 <a:latin typeface="Times New Roman" panose="02020603050405020304" pitchFamily="18" charset="0"/>
                 <a:cs typeface="Times New Roman" panose="02020603050405020304" pitchFamily="18" charset="0"/>
               </a:rPr>
               <a:t> also integrates performance analytics feature </a:t>
             </a:r>
             <a:r>
-              <a:rPr lang="en-IN" sz="2000" dirty="0">
+              <a:rPr lang="en-IN" dirty="0">
                 <a:effectLst/>
                 <a:latin typeface="Times New Roman" panose="02020603050405020304" pitchFamily="18" charset="0"/>
                 <a:ea typeface="Times New Roman" panose="02020603050405020304" pitchFamily="18" charset="0"/>
               </a:rPr>
               <a:t>to enhance the student learning experience and academic performance in an organized and accessible manner.</a:t>
             </a:r>
-            <a:endParaRPr lang="en-US" sz="2000" dirty="0">
+            <a:endParaRPr lang="en-US" dirty="0">
               <a:latin typeface="Times New Roman" panose="02020603050405020304" pitchFamily="18" charset="0"/>
               <a:cs typeface="Times New Roman" panose="02020603050405020304" pitchFamily="18" charset="0"/>
             </a:endParaRPr>
@@ -17705,15 +18040,15 @@
               </a:spcAft>
             </a:pPr>
             <a:r>
-              <a:rPr lang="en-IN" sz="2200" dirty="0">
+              <a:rPr lang="en-IN" sz="1900" dirty="0">
                 <a:effectLst/>
                 <a:latin typeface="Times New Roman" panose="02020603050405020304" pitchFamily="18" charset="0"/>
                 <a:ea typeface="Times New Roman" panose="02020603050405020304" pitchFamily="18" charset="0"/>
                 <a:cs typeface="Times New Roman" panose="02020603050405020304" pitchFamily="18" charset="0"/>
               </a:rPr>
-              <a:t>With the rise of the digital education system, students are rapidly accessing and depending on online learning resources for their academic support and exam preparation. However, due to the availability of various educational websites, many platforms provide either study-related material or tests for practice and lack personalized practice tools but rarely all in a single well-organized platform. Students repeatedly switch between many applications for different learning materials, such as MCQ practice, notes, and interactive flashcards, leading to inefficient learning and confusion. Additionally, the lack of proper progress and structured courses affects consistency and learning. This scattered learning experience highlights the need for an integrated learning platform.</a:t>
-            </a:r>
-            <a:endParaRPr lang="en-US" sz="2200" dirty="0">
+              <a:t>With the rise of the digital education system, students are rapidly accessing and depending on online learning resources for their academic support and exam preparation. However, due to the availability of various educational websites, many platforms provide either study-related material or tests for practice and lack personalized practice tools but rarely all in a single well-organized platform. Students repeatedly switch between many applications for different learning materials, such as MCQ practice, notes, and interactive flashcards, leading to inefficient learning and confusion. Additionally, the lack of proper progress and structured courses affects consistency and learning. This scattered learning experience that highlights the need for an integrated learning platform.</a:t>
+            </a:r>
+            <a:endParaRPr lang="en-US" sz="1900" dirty="0">
               <a:effectLst/>
               <a:latin typeface="Times New Roman" panose="02020603050405020304" pitchFamily="18" charset="0"/>
               <a:ea typeface="Calibri" panose="020F0502020204030204" pitchFamily="34" charset="0"/>
@@ -17774,7 +18109,7 @@
         </p:nvSpPr>
         <p:spPr>
           <a:xfrm>
-            <a:off x="261238" y="-73406"/>
+            <a:off x="74425" y="-73406"/>
             <a:ext cx="3588774" cy="905466"/>
           </a:xfrm>
           <a:prstGeom prst="rect">
@@ -17809,7 +18144,7 @@
               </a:lnSpc>
             </a:pPr>
             <a:r>
-              <a:rPr lang="en" sz="3200" b="1" u="none" strike="noStrike" dirty="0">
+              <a:rPr lang="en" sz="2800" b="1" u="none" strike="noStrike" dirty="0">
                 <a:solidFill>
                   <a:schemeClr val="dk1"/>
                 </a:solidFill>
@@ -17820,7 +18155,7 @@
               </a:rPr>
               <a:t>Problem Statement</a:t>
             </a:r>
-            <a:endParaRPr lang="en-IN" sz="3200" b="1" u="none" strike="noStrike" dirty="0">
+            <a:endParaRPr lang="en-IN" sz="2800" b="1" u="none" strike="noStrike" dirty="0">
               <a:solidFill>
                 <a:srgbClr val="000000"/>
               </a:solidFill>
@@ -17872,26 +18207,23 @@
             <p:ph type="title"/>
           </p:nvPr>
         </p:nvSpPr>
-        <p:spPr/>
+        <p:spPr>
+          <a:xfrm>
+            <a:off x="0" y="-9832"/>
+            <a:ext cx="5484960" cy="912960"/>
+          </a:xfrm>
+        </p:spPr>
         <p:txBody>
           <a:bodyPr/>
           <a:lstStyle/>
           <a:p>
             <a:r>
-              <a:rPr lang="en-US" sz="3600" b="1" dirty="0"/>
-              <a:t>   </a:t>
-            </a:r>
-            <a:r>
-              <a:rPr lang="en-US" sz="3200" b="1" dirty="0">
+              <a:rPr lang="en-US" sz="2800" b="1" dirty="0">
                 <a:latin typeface="Times New Roman" panose="02020603050405020304" pitchFamily="18" charset="0"/>
                 <a:cs typeface="Times New Roman" panose="02020603050405020304" pitchFamily="18" charset="0"/>
               </a:rPr>
-              <a:t>Tools and Technologies</a:t>
-            </a:r>
-            <a:endParaRPr lang="en-US" sz="3600" b="1" dirty="0">
-              <a:latin typeface="Times New Roman" panose="02020603050405020304" pitchFamily="18" charset="0"/>
-              <a:cs typeface="Times New Roman" panose="02020603050405020304" pitchFamily="18" charset="0"/>
-            </a:endParaRPr>
+              <a:t>   Tools and Technologies</a:t>
+            </a:r>
           </a:p>
         </p:txBody>
       </p:sp>
@@ -17913,7 +18245,7 @@
         </p:nvSpPr>
         <p:spPr>
           <a:xfrm>
-            <a:off x="363792" y="1042220"/>
+            <a:off x="432619" y="1170039"/>
             <a:ext cx="8711381" cy="4689986"/>
           </a:xfrm>
         </p:spPr>
@@ -17933,7 +18265,7 @@
               <a:buNone/>
             </a:pPr>
             <a:r>
-              <a:rPr lang="en-US" sz="2200" dirty="0" err="1">
+              <a:rPr lang="en-US" sz="1900" dirty="0" err="1">
                 <a:solidFill>
                   <a:schemeClr val="dk1"/>
                 </a:solidFill>
@@ -17945,7 +18277,7 @@
               <a:t>EdNote’s</a:t>
             </a:r>
             <a:r>
-              <a:rPr lang="en-US" sz="2200" dirty="0">
+              <a:rPr lang="en-US" sz="1900" dirty="0">
                 <a:solidFill>
                   <a:schemeClr val="dk1"/>
                 </a:solidFill>
@@ -17967,7 +18299,7 @@
               </a:spcAft>
               <a:buNone/>
             </a:pPr>
-            <a:endParaRPr lang="en-US" sz="2000" dirty="0">
+            <a:endParaRPr lang="en-US" sz="1900" dirty="0">
               <a:latin typeface="Times New Roman" panose="02020603050405020304" pitchFamily="18" charset="0"/>
               <a:cs typeface="Times New Roman" panose="02020603050405020304" pitchFamily="18" charset="0"/>
             </a:endParaRPr>
@@ -17988,7 +18320,7 @@
               <a:buChar char="•"/>
             </a:pPr>
             <a:r>
-              <a:rPr lang="en-US" sz="2200" b="1" dirty="0">
+              <a:rPr lang="en-US" sz="1900" b="1" dirty="0">
                 <a:solidFill>
                   <a:schemeClr val="dk1"/>
                 </a:solidFill>
@@ -17999,7 +18331,7 @@
               </a:rPr>
               <a:t>MongoDB:</a:t>
             </a:r>
-            <a:endParaRPr lang="en-US" sz="3500" dirty="0">
+            <a:endParaRPr lang="en-US" sz="1900" dirty="0">
               <a:latin typeface="Times New Roman"/>
               <a:ea typeface="Times New Roman"/>
               <a:cs typeface="Times New Roman"/>
@@ -18033,7 +18365,7 @@
               </a:rPr>
               <a:t>A NoSQL database used to store user details and other data.</a:t>
             </a:r>
-            <a:endParaRPr lang="en-US" sz="2600" dirty="0">
+            <a:endParaRPr lang="en-US" sz="1900" dirty="0">
               <a:latin typeface="Times New Roman"/>
               <a:ea typeface="Times New Roman"/>
               <a:cs typeface="Times New Roman"/>
@@ -18082,7 +18414,7 @@
               <a:buSzPts val="1800"/>
               <a:buNone/>
             </a:pPr>
-            <a:endParaRPr lang="en-US" dirty="0">
+            <a:endParaRPr lang="en-US" sz="1900" dirty="0">
               <a:latin typeface="Times New Roman"/>
               <a:ea typeface="Times New Roman"/>
               <a:cs typeface="Times New Roman"/>
@@ -18105,7 +18437,7 @@
               <a:buChar char="•"/>
             </a:pPr>
             <a:r>
-              <a:rPr lang="en-US" sz="2200" b="1" dirty="0">
+              <a:rPr lang="en-US" sz="1900" b="1" dirty="0">
                 <a:solidFill>
                   <a:schemeClr val="dk1"/>
                 </a:solidFill>
@@ -18116,7 +18448,7 @@
               </a:rPr>
               <a:t>Express.js:</a:t>
             </a:r>
-            <a:endParaRPr lang="en-US" sz="3500" dirty="0">
+            <a:endParaRPr lang="en-US" sz="1900" dirty="0">
               <a:latin typeface="Times New Roman"/>
               <a:ea typeface="Times New Roman"/>
               <a:cs typeface="Times New Roman"/>
@@ -18150,7 +18482,7 @@
               </a:rPr>
               <a:t>Web application framework for handling backend logic and APIs.</a:t>
             </a:r>
-            <a:endParaRPr lang="en-US" sz="2600" dirty="0">
+            <a:endParaRPr lang="en-US" sz="1900" dirty="0">
               <a:latin typeface="Times New Roman"/>
               <a:ea typeface="Times New Roman"/>
               <a:cs typeface="Times New Roman"/>
@@ -18199,7 +18531,7 @@
               <a:buSzPts val="1800"/>
               <a:buNone/>
             </a:pPr>
-            <a:endParaRPr lang="en-US" dirty="0">
+            <a:endParaRPr lang="en-US" sz="1900" dirty="0">
               <a:latin typeface="Times New Roman"/>
               <a:ea typeface="Times New Roman"/>
               <a:cs typeface="Times New Roman"/>
@@ -18222,7 +18554,7 @@
               <a:buChar char="•"/>
             </a:pPr>
             <a:r>
-              <a:rPr lang="en-US" sz="2200" b="1" dirty="0">
+              <a:rPr lang="en-US" sz="1900" b="1" dirty="0">
                 <a:solidFill>
                   <a:schemeClr val="dk1"/>
                 </a:solidFill>
@@ -18233,7 +18565,7 @@
               </a:rPr>
               <a:t>React:</a:t>
             </a:r>
-            <a:endParaRPr lang="en-US" sz="3500" dirty="0">
+            <a:endParaRPr lang="en-US" sz="1900" dirty="0">
               <a:latin typeface="Times New Roman"/>
               <a:ea typeface="Times New Roman"/>
               <a:cs typeface="Times New Roman"/>
@@ -18267,7 +18599,7 @@
               </a:rPr>
               <a:t>A library for creating dynamic and user-friendly interfaces.</a:t>
             </a:r>
-            <a:endParaRPr lang="en-US" sz="2600" dirty="0">
+            <a:endParaRPr lang="en-US" sz="1900" dirty="0">
               <a:latin typeface="Times New Roman"/>
               <a:ea typeface="Times New Roman"/>
               <a:cs typeface="Times New Roman"/>
@@ -18316,7 +18648,7 @@
               <a:buSzPts val="1800"/>
               <a:buNone/>
             </a:pPr>
-            <a:endParaRPr lang="en-US" dirty="0">
+            <a:endParaRPr lang="en-US" sz="1900" dirty="0">
               <a:latin typeface="Times New Roman"/>
               <a:ea typeface="Times New Roman"/>
               <a:cs typeface="Times New Roman"/>
@@ -18339,7 +18671,7 @@
               <a:buChar char="•"/>
             </a:pPr>
             <a:r>
-              <a:rPr lang="en-US" sz="2200" b="1" dirty="0">
+              <a:rPr lang="en-US" sz="1900" b="1" dirty="0">
                 <a:solidFill>
                   <a:schemeClr val="dk1"/>
                 </a:solidFill>
@@ -18350,7 +18682,7 @@
               </a:rPr>
               <a:t>Node.js:</a:t>
             </a:r>
-            <a:endParaRPr lang="en-US" sz="3900" dirty="0">
+            <a:endParaRPr lang="en-US" sz="1900" dirty="0">
               <a:latin typeface="Times New Roman"/>
               <a:ea typeface="Times New Roman"/>
               <a:cs typeface="Times New Roman"/>
@@ -18384,7 +18716,7 @@
               </a:rPr>
               <a:t>A server-side JavaScript runtime environment, allowing fast and real-time interactions and scalable development.</a:t>
             </a:r>
-            <a:endParaRPr lang="en-US" sz="2600" dirty="0">
+            <a:endParaRPr lang="en-US" sz="1900" dirty="0">
               <a:latin typeface="Times New Roman"/>
               <a:ea typeface="Times New Roman"/>
               <a:cs typeface="Times New Roman"/>
@@ -18460,7 +18792,7 @@
         </p:nvSpPr>
         <p:spPr>
           <a:xfrm>
-            <a:off x="261238" y="-73406"/>
+            <a:off x="0" y="0"/>
             <a:ext cx="3465188" cy="905466"/>
           </a:xfrm>
           <a:prstGeom prst="rect">
@@ -18495,7 +18827,7 @@
               </a:lnSpc>
             </a:pPr>
             <a:r>
-              <a:rPr lang="en" sz="3200" b="1" u="none" strike="noStrike" dirty="0">
+              <a:rPr lang="en" sz="2800" b="1" u="none" strike="noStrike" dirty="0">
                 <a:solidFill>
                   <a:schemeClr val="dk1"/>
                 </a:solidFill>
@@ -18506,7 +18838,7 @@
               </a:rPr>
               <a:t>Project Snapshots</a:t>
             </a:r>
-            <a:endParaRPr lang="en-IN" sz="3200" b="1" u="none" strike="noStrike" dirty="0">
+            <a:endParaRPr lang="en-IN" sz="2800" b="1" u="none" strike="noStrike" dirty="0">
               <a:solidFill>
                 <a:srgbClr val="000000"/>
               </a:solidFill>
@@ -18771,7 +19103,7 @@
           <p:cNvPr id="2" name="Title 1">
             <a:extLst>
               <a:ext uri="{FF2B5EF4-FFF2-40B4-BE49-F238E27FC236}">
-                <a16:creationId xmlns:a16="http://schemas.microsoft.com/office/drawing/2014/main" id="{CCFB7F41-614B-4464-8F49-98AF3596C878}"/>
+                <a16:creationId xmlns:a16="http://schemas.microsoft.com/office/drawing/2014/main" id="{692A8177-313B-4A4E-B8CA-3180A889D10C}"/>
               </a:ext>
             </a:extLst>
           </p:cNvPr>
@@ -18784,8 +19116,8 @@
         </p:nvSpPr>
         <p:spPr>
           <a:xfrm>
-            <a:off x="383458" y="0"/>
-            <a:ext cx="5484960" cy="912960"/>
+            <a:off x="304801" y="-68826"/>
+            <a:ext cx="6410632" cy="912960"/>
           </a:xfrm>
         </p:spPr>
         <p:txBody>
@@ -18793,142 +19125,215 @@
           <a:lstStyle/>
           <a:p>
             <a:r>
-              <a:rPr lang="en-US" sz="3200" b="1" dirty="0">
+              <a:rPr lang="en-US" sz="2800" b="1" dirty="0">
                 <a:latin typeface="Times New Roman" panose="02020603050405020304" pitchFamily="18" charset="0"/>
                 <a:cs typeface="Times New Roman" panose="02020603050405020304" pitchFamily="18" charset="0"/>
               </a:rPr>
-              <a:t>Key Features</a:t>
-            </a:r>
+              <a:t>Software &amp; Hardware Requirements</a:t>
+            </a:r>
+            <a:endParaRPr lang="en-US" sz="2800" dirty="0"/>
           </a:p>
         </p:txBody>
       </p:sp>
       <p:sp>
         <p:nvSpPr>
-          <p:cNvPr id="3" name="Text Placeholder 2">
+          <p:cNvPr id="5" name="TextBox 4">
             <a:extLst>
               <a:ext uri="{FF2B5EF4-FFF2-40B4-BE49-F238E27FC236}">
-                <a16:creationId xmlns:a16="http://schemas.microsoft.com/office/drawing/2014/main" id="{A136BB09-1FCB-4C64-A33E-812441A29E8C}"/>
+                <a16:creationId xmlns:a16="http://schemas.microsoft.com/office/drawing/2014/main" id="{814F3CAD-F54E-493A-99BC-375A35E0C3E0}"/>
               </a:ext>
             </a:extLst>
           </p:cNvPr>
-          <p:cNvSpPr>
-            <a:spLocks noGrp="1"/>
-          </p:cNvSpPr>
-          <p:nvPr>
-            <p:ph type="body"/>
-          </p:nvPr>
+          <p:cNvSpPr txBox="1"/>
+          <p:nvPr/>
         </p:nvSpPr>
         <p:spPr>
           <a:xfrm>
-            <a:off x="304801" y="835741"/>
-            <a:ext cx="8347586" cy="4090219"/>
+            <a:off x="452284" y="1484671"/>
+            <a:ext cx="7983793" cy="4524315"/>
           </a:xfrm>
+          <a:prstGeom prst="rect">
+            <a:avLst/>
+          </a:prstGeom>
+          <a:noFill/>
         </p:spPr>
         <p:txBody>
-          <a:bodyPr>
-            <a:normAutofit/>
+          <a:bodyPr wrap="square" rtlCol="0">
+            <a:spAutoFit/>
           </a:bodyPr>
           <a:lstStyle/>
           <a:p>
-            <a:pPr marL="457200" indent="-457200">
-              <a:buFont typeface="+mj-lt"/>
-              <a:buAutoNum type="arabicPeriod"/>
-            </a:pPr>
-            <a:r>
-              <a:rPr lang="en-US" sz="2000" b="1" dirty="0">
+            <a:r>
+              <a:rPr lang="en-US" b="1" dirty="0">
                 <a:latin typeface="Times New Roman" panose="02020603050405020304" pitchFamily="18" charset="0"/>
                 <a:cs typeface="Times New Roman" panose="02020603050405020304" pitchFamily="18" charset="0"/>
               </a:rPr>
-              <a:t>MCQ’s and Courses: </a:t>
-            </a:r>
-            <a:r>
-              <a:rPr lang="en-US" sz="1800" dirty="0" err="1">
+              <a:t>Software Requirements</a:t>
+            </a:r>
+          </a:p>
+          <a:p>
+            <a:endParaRPr lang="en-US" b="1" dirty="0">
+              <a:latin typeface="Times New Roman" panose="02020603050405020304" pitchFamily="18" charset="0"/>
+              <a:cs typeface="Times New Roman" panose="02020603050405020304" pitchFamily="18" charset="0"/>
+            </a:endParaRPr>
+          </a:p>
+          <a:p>
+            <a:pPr marL="285750" indent="-285750">
+              <a:buFont typeface="Arial" panose="020B0604020202020204" pitchFamily="34" charset="0"/>
+              <a:buChar char="•"/>
+            </a:pPr>
+            <a:r>
+              <a:rPr lang="en-US" dirty="0">
                 <a:latin typeface="Times New Roman" panose="02020603050405020304" pitchFamily="18" charset="0"/>
                 <a:cs typeface="Times New Roman" panose="02020603050405020304" pitchFamily="18" charset="0"/>
               </a:rPr>
-              <a:t>EdNote’s</a:t>
-            </a:r>
-            <a:r>
-              <a:rPr lang="en-US" sz="1800" dirty="0">
+              <a:t>Operating System: Windows 10/11 and macOS</a:t>
+            </a:r>
+          </a:p>
+          <a:p>
+            <a:pPr marL="285750" indent="-285750">
+              <a:buFont typeface="Arial" panose="020B0604020202020204" pitchFamily="34" charset="0"/>
+              <a:buChar char="•"/>
+            </a:pPr>
+            <a:r>
+              <a:rPr lang="en-US" dirty="0">
                 <a:latin typeface="Times New Roman" panose="02020603050405020304" pitchFamily="18" charset="0"/>
                 <a:cs typeface="Times New Roman" panose="02020603050405020304" pitchFamily="18" charset="0"/>
               </a:rPr>
-              <a:t> provide a comprehensive collection of MCQ feature and also including courses part, helping to practice topics and learning to enhance knowledge.</a:t>
-            </a:r>
-            <a:endParaRPr lang="en-US" sz="2000" b="1" dirty="0">
+              <a:t>Programming Language: JavaScript (React for Frontend, Node.js for Backend)</a:t>
+            </a:r>
+          </a:p>
+          <a:p>
+            <a:pPr marL="285750" indent="-285750">
+              <a:buFont typeface="Arial" panose="020B0604020202020204" pitchFamily="34" charset="0"/>
+              <a:buChar char="•"/>
+            </a:pPr>
+            <a:r>
+              <a:rPr lang="en-US" dirty="0">
+                <a:latin typeface="Times New Roman" panose="02020603050405020304" pitchFamily="18" charset="0"/>
+                <a:cs typeface="Times New Roman" panose="02020603050405020304" pitchFamily="18" charset="0"/>
+              </a:rPr>
+              <a:t>Database: MongoDB</a:t>
+            </a:r>
+          </a:p>
+          <a:p>
+            <a:pPr marL="285750" indent="-285750">
+              <a:buFont typeface="Arial" panose="020B0604020202020204" pitchFamily="34" charset="0"/>
+              <a:buChar char="•"/>
+            </a:pPr>
+            <a:r>
+              <a:rPr lang="en-US" dirty="0">
+                <a:latin typeface="Times New Roman" panose="02020603050405020304" pitchFamily="18" charset="0"/>
+                <a:cs typeface="Times New Roman" panose="02020603050405020304" pitchFamily="18" charset="0"/>
+              </a:rPr>
+              <a:t>Code Editor: Visual Studio Code</a:t>
+            </a:r>
+          </a:p>
+          <a:p>
+            <a:pPr marL="285750" indent="-285750">
+              <a:buFont typeface="Arial" panose="020B0604020202020204" pitchFamily="34" charset="0"/>
+              <a:buChar char="•"/>
+            </a:pPr>
+            <a:r>
+              <a:rPr lang="en-US" dirty="0">
+                <a:latin typeface="Times New Roman" panose="02020603050405020304" pitchFamily="18" charset="0"/>
+                <a:cs typeface="Times New Roman" panose="02020603050405020304" pitchFamily="18" charset="0"/>
+              </a:rPr>
+              <a:t>Package Manager: </a:t>
+            </a:r>
+            <a:r>
+              <a:rPr lang="en-US" dirty="0" err="1">
+                <a:latin typeface="Times New Roman" panose="02020603050405020304" pitchFamily="18" charset="0"/>
+                <a:cs typeface="Times New Roman" panose="02020603050405020304" pitchFamily="18" charset="0"/>
+              </a:rPr>
+              <a:t>npm</a:t>
+            </a:r>
+            <a:endParaRPr lang="en-US" dirty="0">
               <a:latin typeface="Times New Roman" panose="02020603050405020304" pitchFamily="18" charset="0"/>
               <a:cs typeface="Times New Roman" panose="02020603050405020304" pitchFamily="18" charset="0"/>
             </a:endParaRPr>
           </a:p>
           <a:p>
-            <a:pPr marL="457200" indent="-457200">
-              <a:buFont typeface="+mj-lt"/>
-              <a:buAutoNum type="arabicPeriod"/>
-            </a:pPr>
-            <a:r>
-              <a:rPr lang="en-US" sz="2000" b="1" dirty="0">
+            <a:endParaRPr lang="en-US" dirty="0">
+              <a:latin typeface="Times New Roman" panose="02020603050405020304" pitchFamily="18" charset="0"/>
+              <a:cs typeface="Times New Roman" panose="02020603050405020304" pitchFamily="18" charset="0"/>
+            </a:endParaRPr>
+          </a:p>
+          <a:p>
+            <a:endParaRPr lang="en-US" dirty="0">
+              <a:latin typeface="Times New Roman" panose="02020603050405020304" pitchFamily="18" charset="0"/>
+              <a:cs typeface="Times New Roman" panose="02020603050405020304" pitchFamily="18" charset="0"/>
+            </a:endParaRPr>
+          </a:p>
+          <a:p>
+            <a:r>
+              <a:rPr lang="en-US" b="1" dirty="0">
                 <a:latin typeface="Times New Roman" panose="02020603050405020304" pitchFamily="18" charset="0"/>
                 <a:cs typeface="Times New Roman" panose="02020603050405020304" pitchFamily="18" charset="0"/>
               </a:rPr>
-              <a:t>Smart Notes: </a:t>
-            </a:r>
-            <a:r>
-              <a:rPr lang="en-US" sz="1800" dirty="0">
+              <a:t>Hardware Requirements</a:t>
+            </a:r>
+          </a:p>
+          <a:p>
+            <a:endParaRPr lang="en-US" b="1" dirty="0">
+              <a:latin typeface="Times New Roman" panose="02020603050405020304" pitchFamily="18" charset="0"/>
+              <a:cs typeface="Times New Roman" panose="02020603050405020304" pitchFamily="18" charset="0"/>
+            </a:endParaRPr>
+          </a:p>
+          <a:p>
+            <a:pPr marL="285750" indent="-285750">
+              <a:buFont typeface="Arial" panose="020B0604020202020204" pitchFamily="34" charset="0"/>
+              <a:buChar char="•"/>
+            </a:pPr>
+            <a:r>
+              <a:rPr lang="en-US" dirty="0">
                 <a:latin typeface="Times New Roman" panose="02020603050405020304" pitchFamily="18" charset="0"/>
                 <a:cs typeface="Times New Roman" panose="02020603050405020304" pitchFamily="18" charset="0"/>
               </a:rPr>
-              <a:t>This feature simplify the study process with adding notes of particular topic, to pin important ones, to search within notes and deleting notes to make revision faster and more effective.</a:t>
-            </a:r>
-            <a:endParaRPr lang="en-US" sz="2000" b="1" dirty="0">
-              <a:latin typeface="Times New Roman" panose="02020603050405020304" pitchFamily="18" charset="0"/>
-              <a:cs typeface="Times New Roman" panose="02020603050405020304" pitchFamily="18" charset="0"/>
-            </a:endParaRPr>
-          </a:p>
-          <a:p>
-            <a:pPr marL="457200" indent="-457200">
-              <a:buFont typeface="+mj-lt"/>
-              <a:buAutoNum type="arabicPeriod"/>
-            </a:pPr>
-            <a:r>
-              <a:rPr lang="en-US" sz="2000" b="1" dirty="0">
+              <a:t>Processor: Intel Core i5 or better</a:t>
+            </a:r>
+          </a:p>
+          <a:p>
+            <a:pPr marL="285750" indent="-285750">
+              <a:buFont typeface="Arial" panose="020B0604020202020204" pitchFamily="34" charset="0"/>
+              <a:buChar char="•"/>
+            </a:pPr>
+            <a:r>
+              <a:rPr lang="en-US" dirty="0">
                 <a:latin typeface="Times New Roman" panose="02020603050405020304" pitchFamily="18" charset="0"/>
                 <a:cs typeface="Times New Roman" panose="02020603050405020304" pitchFamily="18" charset="0"/>
               </a:rPr>
-              <a:t>Interactive Flashcards: </a:t>
-            </a:r>
-            <a:r>
-              <a:rPr lang="en-US" sz="1800" dirty="0">
+              <a:t>Internet: Stable speed connection</a:t>
+            </a:r>
+          </a:p>
+          <a:p>
+            <a:pPr marL="285750" indent="-285750">
+              <a:buFont typeface="Arial" panose="020B0604020202020204" pitchFamily="34" charset="0"/>
+              <a:buChar char="•"/>
+            </a:pPr>
+            <a:r>
+              <a:rPr lang="en-US" dirty="0">
                 <a:latin typeface="Times New Roman" panose="02020603050405020304" pitchFamily="18" charset="0"/>
                 <a:cs typeface="Times New Roman" panose="02020603050405020304" pitchFamily="18" charset="0"/>
               </a:rPr>
-              <a:t>Make revision easy by using flashcards to support in recalling topics that help in retain information longer in very effective way.</a:t>
-            </a:r>
-          </a:p>
-          <a:p>
-            <a:pPr marL="457200" indent="-457200">
-              <a:buFont typeface="+mj-lt"/>
-              <a:buAutoNum type="arabicPeriod"/>
-            </a:pPr>
-            <a:r>
-              <a:rPr lang="en-US" sz="2000" b="1" dirty="0">
+              <a:t>RAM: 8GB or 16 GB</a:t>
+            </a:r>
+          </a:p>
+          <a:p>
+            <a:pPr marL="285750" indent="-285750">
+              <a:buFont typeface="Arial" panose="020B0604020202020204" pitchFamily="34" charset="0"/>
+              <a:buChar char="•"/>
+            </a:pPr>
+            <a:r>
+              <a:rPr lang="en-US" dirty="0">
                 <a:latin typeface="Times New Roman" panose="02020603050405020304" pitchFamily="18" charset="0"/>
                 <a:cs typeface="Times New Roman" panose="02020603050405020304" pitchFamily="18" charset="0"/>
               </a:rPr>
-              <a:t>Analytics: </a:t>
-            </a:r>
-            <a:r>
-              <a:rPr lang="en-US" sz="1800" dirty="0">
-                <a:latin typeface="Times New Roman" panose="02020603050405020304" pitchFamily="18" charset="0"/>
-                <a:cs typeface="Times New Roman" panose="02020603050405020304" pitchFamily="18" charset="0"/>
-              </a:rPr>
-              <a:t>This feature provides a visual representation of score trend and topic-wise performance through charts. Helping users to get a clear view to identify areas to do better and improve accordingly. </a:t>
-            </a:r>
-          </a:p>
-          <a:p>
-            <a:pPr marL="0" indent="0">
-              <a:buNone/>
-            </a:pPr>
-            <a:endParaRPr lang="en-US" sz="2000" b="1" dirty="0">
+              <a:t>Storage: 100GB SSD</a:t>
+            </a:r>
+          </a:p>
+          <a:p>
+            <a:endParaRPr lang="en-US" dirty="0">
               <a:latin typeface="Times New Roman" panose="02020603050405020304" pitchFamily="18" charset="0"/>
               <a:cs typeface="Times New Roman" panose="02020603050405020304" pitchFamily="18" charset="0"/>
             </a:endParaRPr>
@@ -18938,7 +19343,7 @@
     </p:spTree>
     <p:extLst>
       <p:ext uri="{BB962C8B-B14F-4D97-AF65-F5344CB8AC3E}">
-        <p14:creationId xmlns:p14="http://schemas.microsoft.com/office/powerpoint/2010/main" val="1189144508"/>
+        <p14:creationId xmlns:p14="http://schemas.microsoft.com/office/powerpoint/2010/main" val="4193142060"/>
       </p:ext>
     </p:extLst>
   </p:cSld>
